--- a/OSu/Chap08.pptx
+++ b/OSu/Chap08.pptx
@@ -16283,7 +16283,7 @@
             <a:pPr lvl="1"/>
             <a:r>
               <a:rPr lang="en-US" altLang="en-US" sz="2400" dirty="0"/>
-              <a:t>Require process to request and be allocated all its resources </a:t>
+              <a:t>Require a process to request and be allocated all its resources </a:t>
             </a:r>
             <a:r>
               <a:rPr lang="en-US" altLang="en-US" sz="2400" dirty="0">
@@ -16784,12 +16784,14 @@
             </a:r>
           </a:p>
           <a:p>
+            <a:pPr lvl="1"/>
             <a:r>
               <a:rPr lang="en-US" altLang="en-US" sz="2000" dirty="0"/>
               <a:t>Simply assign each resource (i.e., mutex locks) a unique number</a:t>
             </a:r>
           </a:p>
           <a:p>
+            <a:pPr lvl="1"/>
             <a:r>
               <a:rPr lang="en-US" altLang="en-US" sz="2000" dirty="0">
                 <a:solidFill>
@@ -16908,7 +16910,7 @@
         </p:blipFill>
         <p:spPr bwMode="auto">
           <a:xfrm>
-            <a:off x="5438085" y="2269781"/>
+            <a:off x="5516217" y="2540244"/>
             <a:ext cx="3098800" cy="3917950"/>
           </a:xfrm>
           <a:prstGeom prst="rect">
@@ -17504,7 +17506,19 @@
             </a:r>
             <a:r>
               <a:rPr lang="en-US" altLang="en-US" sz="2000" dirty="0"/>
-              <a:t>&gt; of ALL the processes in the system such that for each P</a:t>
+              <a:t>&gt; of </a:t>
+            </a:r>
+            <a:r>
+              <a:rPr lang="en-US" altLang="en-US" sz="2000" dirty="0">
+                <a:solidFill>
+                  <a:srgbClr val="0000FF"/>
+                </a:solidFill>
+              </a:rPr>
+              <a:t>ALL the processes </a:t>
+            </a:r>
+            <a:r>
+              <a:rPr lang="en-US" altLang="en-US" sz="2000" dirty="0"/>
+              <a:t>in the system such that for each P</a:t>
             </a:r>
             <a:r>
               <a:rPr lang="en-US" altLang="en-US" sz="2000" baseline="-25000" dirty="0"/>
@@ -22544,7 +22558,14 @@
             </a:r>
             <a:r>
               <a:rPr lang="en-US" altLang="en-US" sz="2400" dirty="0"/>
-              <a:t> in the graph. If there is a cycle, there exists a deadlock</a:t>
+              <a:t> in the graph</a:t>
+            </a:r>
+          </a:p>
+          <a:p>
+            <a:pPr lvl="1"/>
+            <a:r>
+              <a:rPr lang="en-US" altLang="en-US" sz="2400" dirty="0"/>
+              <a:t>If there is a cycle, there exists a deadlock</a:t>
             </a:r>
           </a:p>
           <a:p>
@@ -23380,8 +23401,13 @@
             </a:r>
             <a:r>
               <a:rPr lang="en-US" altLang="en-US" sz="2400" dirty="0"/>
-              <a:t>matrix indicates the current request of each process.  </a:t>
-            </a:r>
+              <a:t>matrix indicates the current request of </a:t>
+            </a:r>
+            <a:r>
+              <a:rPr lang="en-US" altLang="en-US" sz="2400"/>
+              <a:t>each process  </a:t>
+            </a:r>
+            <a:endParaRPr lang="en-US" altLang="en-US" sz="2400" dirty="0"/>
           </a:p>
           <a:p>
             <a:pPr lvl="1"/>
